--- a/docs/presentation.pptx
+++ b/docs/presentation.pptx
@@ -874,7 +874,7 @@
             <a:r>
               <a:rPr lang="en-US" dirty="0"/>
               <a:t>The dashboard is a single API call. Nine queries run in parallel with Promise.all, so the response takes about as long as the slowest one rather than the sum.
-'Not yet started' was the interesting one to compute. It's the absence of a row - so I start from the list of team members and subtract the ones who filed, rather than querying reports.</a:t>
+Compliance splits three ways: on time, late, and not filed. Late compares the first submission against the end of that week, so nobody can be late in a week that is still running. Not filed was the interesting one to compute - it is the absence of a row, so I start from the list of team members and subtract the ones who filed, rather than querying reports.</a:t>
             </a:r>
             <a:endParaRPr lang="en-US" dirty="0"/>
           </a:p>
@@ -5768,7 +5768,7 @@
                 <a:ea typeface="Calibri" pitchFamily="34" charset="-122"/>
                 <a:cs typeface="Calibri" pitchFamily="34" charset="-120"/>
               </a:rPr>
-              <a:t>2 on time, 1 late</a:t>
+              <a:t>3 on time, 2 pending</a:t>
             </a:r>
             <a:endParaRPr lang="en-US" sz="1200" dirty="0"/>
           </a:p>
@@ -6259,7 +6259,7 @@
                 <a:ea typeface="Calibri" pitchFamily="34" charset="-122"/>
                 <a:cs typeface="Calibri" pitchFamily="34" charset="-120"/>
               </a:rPr>
-              <a:t>"Not yet started" is the absence of a row - computed from the member list, not from reports</a:t>
+              <a:t>Compliance splits three ways: filed on time, filed after the week closed, and not filed at all</a:t>
             </a:r>
             <a:endParaRPr lang="en-US" sz="1300" dirty="0"/>
           </a:p>
@@ -6280,7 +6280,7 @@
                 <a:ea typeface="Calibri" pitchFamily="34" charset="-122"/>
                 <a:cs typeface="Calibri" pitchFamily="34" charset="-120"/>
               </a:rPr>
-              <a:t>Not filed at all is the absence of a row, so it is computed from the member list, not from reports</a:t>
+              <a:t>That last one is the absence of a row, so it is computed from the member list, not from reports</a:t>
             </a:r>
             <a:endParaRPr lang="en-US" sz="1300" dirty="0"/>
           </a:p>

--- a/docs/presentation.pptx
+++ b/docs/presentation.pptx
@@ -19,6 +19,7 @@
     <p:sldId id="267" r:id="rId13"/>
     <p:sldId id="268" r:id="rId14"/>
     <p:sldId id="269" r:id="rId15"/>
+    <p:sldId id="273" r:id="rId24"/>
     <p:sldId id="270" r:id="rId16"/>
     <p:sldId id="271" r:id="rId17"/>
     <p:sldId id="272" r:id="rId18"/>
@@ -6422,7 +6423,7 @@
                 <a:ea typeface="Cambria" pitchFamily="34" charset="-122"/>
                 <a:cs typeface="Cambria" pitchFamily="34" charset="-120"/>
               </a:rPr>
-              <a:t>Fifteen tests, all on access control</a:t>
+              <a:t>Eighteen tests, all on access control</a:t>
             </a:r>
             <a:endParaRPr lang="en-US" sz="3400" dirty="0"/>
           </a:p>
@@ -6928,7 +6929,7 @@
                 <a:ea typeface="Calibri" pitchFamily="34" charset="-122"/>
                 <a:cs typeface="Calibri" pitchFamily="34" charset="-120"/>
               </a:rPr>
-              <a:t>Every assertion is a read or a rejected write, so the suite never disturbs the demo data - no separate test database needed</a:t>
+              <a:t>Almost all of it is reads and rejected writes. The two tests that do write put back what they changed, so the demo data survives the suite.</a:t>
             </a:r>
             <a:endParaRPr lang="en-US" sz="1350" dirty="0"/>
           </a:p>
@@ -7448,7 +7449,7 @@
                 <a:ea typeface="Cambria" pitchFamily="34" charset="-122"/>
                 <a:cs typeface="Cambria" pitchFamily="34" charset="-120"/>
               </a:rPr>
-              <a:t>Deployment is unfinished</a:t>
+              <a:t>Deployment ran into a wall</a:t>
             </a:r>
             <a:endParaRPr lang="en-US" sz="1600" dirty="0"/>
           </a:p>
@@ -7491,7 +7492,7 @@
                 <a:ea typeface="Calibri" pitchFamily="34" charset="-122"/>
                 <a:cs typeface="Calibri" pitchFamily="34" charset="-120"/>
               </a:rPr>
-              <a:t>Free-tier hosting for a Node API now generally wants card verification</a:t>
+              <a:t>Free-tier hosting for a long-lived Node API now wants card verification</a:t>
             </a:r>
             <a:endParaRPr lang="en-US" sz="1250" dirty="0"/>
           </a:p>
@@ -7512,7 +7513,7 @@
                 <a:ea typeface="Calibri" pitchFamily="34" charset="-122"/>
                 <a:cs typeface="Calibri" pitchFamily="34" charset="-120"/>
               </a:rPr>
-              <a:t>I ran out of time before a working deploy</a:t>
+              <a:t>The API is containerised; the frontend is live on Vercel</a:t>
             </a:r>
             <a:endParaRPr lang="en-US" sz="1250" dirty="0"/>
           </a:p>
@@ -8062,7 +8063,7 @@
                 <a:ea typeface="Cambria" pitchFamily="34" charset="-122"/>
                 <a:cs typeface="Cambria" pitchFamily="34" charset="-120"/>
               </a:rPr>
-              <a:t>AI assistant</a:t>
+              <a:t>Project membership</a:t>
             </a:r>
             <a:endParaRPr lang="en-US" sz="1550" dirty="0"/>
           </a:p>
@@ -8101,7 +8102,7 @@
                 <a:ea typeface="Calibri" pitchFamily="34" charset="-122"/>
                 <a:cs typeface="Calibri" pitchFamily="34" charset="-120"/>
               </a:rPr>
-              <a:t>Not built. A manager asks what the team worked on; the week's reports go to an LLM as context - scoped to what that manager may already see.</a:t>
+              <a:t>ProjectMember is in the schema and seeded, but nothing assigns people to projects yet - the dashboard could then filter by it.</a:t>
             </a:r>
             <a:endParaRPr lang="en-US" sz="1250" dirty="0"/>
           </a:p>
@@ -8690,7 +8691,7 @@
                 <a:ea typeface="Cambria" pitchFamily="34" charset="-122"/>
                 <a:cs typeface="Cambria" pitchFamily="34" charset="-120"/>
               </a:rPr>
-              <a:t>15</a:t>
+              <a:t>18</a:t>
             </a:r>
             <a:endParaRPr lang="en-US" sz="3600" dirty="0"/>
           </a:p>
@@ -8849,6 +8850,471 @@
               <a:t>github.com/RVViduranga/weekly-report-dashboard</a:t>
             </a:r>
             <a:endParaRPr lang="en-US" sz="1300" dirty="0"/>
+          </a:p>
+        </p:txBody>
+      </p:sp>
+    </p:spTree>
+  </p:cSld>
+  <p:clrMapOvr>
+    <a:masterClrMapping/>
+  </p:clrMapOvr>
+</p:sld>
+</file>
+
+<file path=ppt/slides/slide18.xml><?xml version="1.0" encoding="utf-8"?>
+<p:sld xmlns:a="http://schemas.openxmlformats.org/drawingml/2006/main" xmlns:r="http://schemas.openxmlformats.org/officeDocument/2006/relationships" xmlns:p="http://schemas.openxmlformats.org/presentationml/2006/main">
+  <p:cSld name="Slide 6">
+    <p:spTree>
+      <p:nvGrpSpPr>
+        <p:cNvPr id="1" name=""/>
+        <p:cNvGrpSpPr/>
+        <p:nvPr/>
+      </p:nvGrpSpPr>
+      <p:grpSpPr>
+        <a:xfrm>
+          <a:off x="0" y="0"/>
+          <a:ext cx="0" cy="0"/>
+          <a:chOff x="0" y="0"/>
+          <a:chExt cx="0" cy="0"/>
+        </a:xfrm>
+      </p:grpSpPr>
+      <p:sp>
+        <p:nvSpPr>
+          <p:cNvPr id="2" name="Text 0"/>
+          <p:cNvSpPr txBox="1"/>
+          <p:nvPr/>
+        </p:nvSpPr>
+        <p:spPr>
+          <a:xfrm>
+            <a:off x="640080" y="411480"/>
+            <a:ext cx="10881360" cy="274320"/>
+          </a:xfrm>
+          <a:prstGeom prst="rect">
+            <a:avLst/>
+          </a:prstGeom>
+          <a:noFill/>
+          <a:ln/>
+        </p:spPr>
+        <p:txBody>
+          <a:bodyPr wrap="square" lIns="0" tIns="0" rIns="0" bIns="0" rtlCol="0" anchor="ctr"/>
+          <a:lstStyle/>
+          <a:p>
+            <a:pPr indent="0" marL="0">
+              <a:buNone/>
+            </a:pPr>
+            <a:r>
+              <a:rPr lang="en-US" sz="1100" b="1" spc="200" kern="0" dirty="0">
+                <a:solidFill>
+                  <a:srgbClr val="C8873A"/>
+                </a:solidFill>
+                <a:latin typeface="Calibri" pitchFamily="34" charset="0"/>
+                <a:ea typeface="Calibri" pitchFamily="34" charset="-122"/>
+                <a:cs typeface="Calibri" pitchFamily="34" charset="-120"/>
+              </a:rPr>
+              <a:t>AI CHAT ASSISTANT</a:t>
+            </a:r>
+            <a:endParaRPr lang="en-US" sz="1100" dirty="0"/>
+          </a:p>
+        </p:txBody>
+      </p:sp>
+      <p:sp>
+        <p:nvSpPr>
+          <p:cNvPr id="3" name="Text 1"/>
+          <p:cNvSpPr txBox="1"/>
+          <p:nvPr/>
+        </p:nvSpPr>
+        <p:spPr>
+          <a:xfrm>
+            <a:off x="640080" y="685800"/>
+            <a:ext cx="10881360" cy="685800"/>
+          </a:xfrm>
+          <a:prstGeom prst="rect">
+            <a:avLst/>
+          </a:prstGeom>
+          <a:noFill/>
+          <a:ln/>
+        </p:spPr>
+        <p:txBody>
+          <a:bodyPr wrap="square" lIns="0" tIns="0" rIns="0" bIns="0" rtlCol="0" anchor="ctr"/>
+          <a:lstStyle/>
+          <a:p>
+            <a:pPr indent="0" marL="0">
+              <a:buNone/>
+            </a:pPr>
+            <a:r>
+              <a:rPr lang="en-US" sz="3400" b="1" dirty="0">
+                <a:solidFill>
+                  <a:srgbClr val="17211C"/>
+                </a:solidFill>
+                <a:latin typeface="Cambria" pitchFamily="34" charset="0"/>
+                <a:ea typeface="Cambria" pitchFamily="34" charset="-122"/>
+                <a:cs typeface="Cambria" pitchFamily="34" charset="-120"/>
+              </a:rPr>
+              <a:t>Grounded in the reports, not the model</a:t>
+            </a:r>
+            <a:endParaRPr lang="en-US" sz="3400" dirty="0"/>
+          </a:p>
+        </p:txBody>
+      </p:sp>
+      <p:sp>
+        <p:nvSpPr>
+          <p:cNvPr id="4" name="Shape 2"/>
+          <p:cNvSpPr/>
+          <p:nvPr/>
+        </p:nvSpPr>
+        <p:spPr>
+          <a:xfrm>
+            <a:off x="640080" y="1554480"/>
+            <a:ext cx="5303520" cy="3200400"/>
+          </a:xfrm>
+          <a:prstGeom prst="roundRect">
+            <a:avLst>
+              <a:gd name="adj" fmla="val 2571"/>
+            </a:avLst>
+          </a:prstGeom>
+          <a:solidFill>
+            <a:srgbClr val="EFF4F0"/>
+          </a:solidFill>
+          <a:ln w="12700">
+            <a:solidFill>
+              <a:srgbClr val="EFF4F0"/>
+            </a:solidFill>
+            <a:prstDash val="solid"/>
+          </a:ln>
+        </p:spPr>
+      </p:sp>
+      <p:sp>
+        <p:nvSpPr>
+          <p:cNvPr id="5" name="Text 3"/>
+          <p:cNvSpPr txBox="1"/>
+          <p:nvPr/>
+        </p:nvSpPr>
+        <p:spPr>
+          <a:xfrm>
+            <a:off x="896112" y="1755648"/>
+            <a:ext cx="4791456" cy="310896"/>
+          </a:xfrm>
+          <a:prstGeom prst="rect">
+            <a:avLst/>
+          </a:prstGeom>
+          <a:noFill/>
+          <a:ln/>
+        </p:spPr>
+        <p:txBody>
+          <a:bodyPr wrap="square" lIns="0" tIns="0" rIns="0" bIns="0" rtlCol="0" anchor="ctr"/>
+          <a:lstStyle/>
+          <a:p>
+            <a:pPr indent="0" marL="0">
+              <a:buNone/>
+            </a:pPr>
+            <a:r>
+              <a:rPr lang="en-US" sz="1700" b="1" dirty="0">
+                <a:solidFill>
+                  <a:srgbClr val="1F4D3A"/>
+                </a:solidFill>
+                <a:latin typeface="Cambria" pitchFamily="34" charset="0"/>
+                <a:ea typeface="Cambria" pitchFamily="34" charset="-122"/>
+                <a:cs typeface="Cambria" pitchFamily="34" charset="-120"/>
+              </a:rPr>
+              <a:t>How it answers</a:t>
+            </a:r>
+            <a:endParaRPr lang="en-US" sz="1700" dirty="0"/>
+          </a:p>
+        </p:txBody>
+      </p:sp>
+      <p:sp>
+        <p:nvSpPr>
+          <p:cNvPr id="6" name="Text 4"/>
+          <p:cNvSpPr txBox="1"/>
+          <p:nvPr/>
+        </p:nvSpPr>
+        <p:spPr>
+          <a:xfrm>
+            <a:off x="896112" y="2176272"/>
+            <a:ext cx="4791456" cy="2414016"/>
+          </a:xfrm>
+          <a:prstGeom prst="rect">
+            <a:avLst/>
+          </a:prstGeom>
+          <a:noFill/>
+          <a:ln/>
+        </p:spPr>
+        <p:txBody>
+          <a:bodyPr wrap="square" lIns="0" tIns="0" rIns="0" bIns="0" rtlCol="0" anchor="t"/>
+          <a:lstStyle/>
+          <a:p>
+            <a:pPr marL="342900" indent="-342900">
+              <a:spcAft>
+                <a:spcPts val="500"/>
+              </a:spcAft>
+              <a:buSzPct val="100000"/>
+              <a:buChar char="•"/>
+            </a:pPr>
+            <a:r>
+              <a:rPr lang="en-US" sz="1300" dirty="0">
+                <a:solidFill>
+                  <a:srgbClr val="17211C"/>
+                </a:solidFill>
+                <a:latin typeface="Calibri" pitchFamily="34" charset="0"/>
+                <a:ea typeface="Calibri" pitchFamily="34" charset="-122"/>
+                <a:cs typeface="Calibri" pitchFamily="34" charset="-120"/>
+              </a:rPr>
+              <a:t>Manager-only, behind the same requireRole guard</a:t>
+            </a:r>
+            <a:endParaRPr lang="en-US" sz="1300" dirty="0"/>
+          </a:p>
+          <a:p>
+            <a:pPr marL="342900" indent="-342900">
+              <a:spcAft>
+                <a:spcPts val="500"/>
+              </a:spcAft>
+              <a:buSzPct val="100000"/>
+              <a:buChar char="•"/>
+            </a:pPr>
+            <a:r>
+              <a:rPr lang="en-US" sz="1300" dirty="0">
+                <a:solidFill>
+                  <a:srgbClr val="17211C"/>
+                </a:solidFill>
+                <a:latin typeface="Calibri" pitchFamily="34" charset="0"/>
+                <a:ea typeface="Calibri" pitchFamily="34" charset="-122"/>
+                <a:cs typeface="Calibri" pitchFamily="34" charset="-120"/>
+              </a:rPr>
+              <a:t>The week's reports are rendered as plain text into a system message</a:t>
+            </a:r>
+            <a:endParaRPr lang="en-US" sz="1300" dirty="0"/>
+          </a:p>
+          <a:p>
+            <a:pPr marL="342900" indent="-342900">
+              <a:spcAft>
+                <a:spcPts val="500"/>
+              </a:spcAft>
+              <a:buSzPct val="100000"/>
+              <a:buChar char="•"/>
+            </a:pPr>
+            <a:r>
+              <a:rPr lang="en-US" sz="1300" dirty="0">
+                <a:solidFill>
+                  <a:srgbClr val="17211C"/>
+                </a:solidFill>
+                <a:latin typeface="Calibri" pitchFamily="34" charset="0"/>
+                <a:ea typeface="Calibri" pitchFamily="34" charset="-122"/>
+                <a:cs typeface="Calibri" pitchFamily="34" charset="-120"/>
+              </a:rPr>
+              <a:t>No vector store and no retrieval - a week is a few kilobytes</a:t>
+            </a:r>
+            <a:endParaRPr lang="en-US" sz="1300" dirty="0"/>
+          </a:p>
+          <a:p>
+            <a:pPr marL="342900" indent="-342900">
+              <a:spcAft>
+                <a:spcPts val="500"/>
+              </a:spcAft>
+              <a:buSzPct val="100000"/>
+              <a:buChar char="•"/>
+            </a:pPr>
+            <a:r>
+              <a:rPr lang="en-US" sz="1300" dirty="0">
+                <a:solidFill>
+                  <a:srgbClr val="17211C"/>
+                </a:solidFill>
+                <a:latin typeface="Calibri" pitchFamily="34" charset="0"/>
+                <a:ea typeface="Calibri" pitchFamily="34" charset="-122"/>
+                <a:cs typeface="Calibri" pitchFamily="34" charset="-120"/>
+              </a:rPr>
+              <a:t>Six free models tried in order, because a shared pool answers 429</a:t>
+            </a:r>
+            <a:endParaRPr lang="en-US" sz="1300" dirty="0"/>
+          </a:p>
+        </p:txBody>
+      </p:sp>
+      <p:sp>
+        <p:nvSpPr>
+          <p:cNvPr id="7" name="Shape 5"/>
+          <p:cNvSpPr/>
+          <p:nvPr/>
+        </p:nvSpPr>
+        <p:spPr>
+          <a:xfrm>
+            <a:off x="6217920" y="1554480"/>
+            <a:ext cx="5303520" cy="3200400"/>
+          </a:xfrm>
+          <a:prstGeom prst="roundRect">
+            <a:avLst>
+              <a:gd name="adj" fmla="val 2571"/>
+            </a:avLst>
+          </a:prstGeom>
+          <a:solidFill>
+            <a:srgbClr val="EFF4F0"/>
+          </a:solidFill>
+          <a:ln w="12700">
+            <a:solidFill>
+              <a:srgbClr val="EFF4F0"/>
+            </a:solidFill>
+            <a:prstDash val="solid"/>
+          </a:ln>
+        </p:spPr>
+      </p:sp>
+      <p:sp>
+        <p:nvSpPr>
+          <p:cNvPr id="8" name="Text 6"/>
+          <p:cNvSpPr txBox="1"/>
+          <p:nvPr/>
+        </p:nvSpPr>
+        <p:spPr>
+          <a:xfrm>
+            <a:off x="6473952" y="1755648"/>
+            <a:ext cx="4791456" cy="310896"/>
+          </a:xfrm>
+          <a:prstGeom prst="rect">
+            <a:avLst/>
+          </a:prstGeom>
+          <a:noFill/>
+          <a:ln/>
+        </p:spPr>
+        <p:txBody>
+          <a:bodyPr wrap="square" lIns="0" tIns="0" rIns="0" bIns="0" rtlCol="0" anchor="ctr"/>
+          <a:lstStyle/>
+          <a:p>
+            <a:pPr indent="0" marL="0">
+              <a:buNone/>
+            </a:pPr>
+            <a:r>
+              <a:rPr lang="en-US" sz="1700" b="1" dirty="0">
+                <a:solidFill>
+                  <a:srgbClr val="1F4D3A"/>
+                </a:solidFill>
+                <a:latin typeface="Cambria" pitchFamily="34" charset="0"/>
+                <a:ea typeface="Cambria" pitchFamily="34" charset="-122"/>
+                <a:cs typeface="Cambria" pitchFamily="34" charset="-120"/>
+              </a:rPr>
+              <a:t>What never leaves the server</a:t>
+            </a:r>
+            <a:endParaRPr lang="en-US" sz="1700" dirty="0"/>
+          </a:p>
+        </p:txBody>
+      </p:sp>
+      <p:sp>
+        <p:nvSpPr>
+          <p:cNvPr id="9" name="Text 7"/>
+          <p:cNvSpPr txBox="1"/>
+          <p:nvPr/>
+        </p:nvSpPr>
+        <p:spPr>
+          <a:xfrm>
+            <a:off x="6473952" y="2176272"/>
+            <a:ext cx="4791456" cy="2414016"/>
+          </a:xfrm>
+          <a:prstGeom prst="rect">
+            <a:avLst/>
+          </a:prstGeom>
+          <a:noFill/>
+          <a:ln/>
+        </p:spPr>
+        <p:txBody>
+          <a:bodyPr wrap="square" lIns="0" tIns="0" rIns="0" bIns="0" rtlCol="0" anchor="t"/>
+          <a:lstStyle/>
+          <a:p>
+            <a:pPr marL="342900" indent="-342900">
+              <a:spcAft>
+                <a:spcPts val="500"/>
+              </a:spcAft>
+              <a:buSzPct val="100000"/>
+              <a:buChar char="•"/>
+            </a:pPr>
+            <a:r>
+              <a:rPr lang="en-US" sz="1300" dirty="0">
+                <a:solidFill>
+                  <a:srgbClr val="17211C"/>
+                </a:solidFill>
+                <a:latin typeface="Calibri" pitchFamily="34" charset="0"/>
+                <a:ea typeface="Calibri" pitchFamily="34" charset="-122"/>
+                <a:cs typeface="Calibri" pitchFamily="34" charset="-120"/>
+              </a:rPr>
+              <a:t>The Prisma select is the boundary, not the prompt</a:t>
+            </a:r>
+            <a:endParaRPr lang="en-US" sz="1300" dirty="0"/>
+          </a:p>
+          <a:p>
+            <a:pPr marL="342900" indent="-342900">
+              <a:spcAft>
+                <a:spcPts val="500"/>
+              </a:spcAft>
+              <a:buSzPct val="100000"/>
+              <a:buChar char="•"/>
+            </a:pPr>
+            <a:r>
+              <a:rPr lang="en-US" sz="1300" dirty="0">
+                <a:solidFill>
+                  <a:srgbClr val="17211C"/>
+                </a:solidFill>
+                <a:latin typeface="Calibri" pitchFamily="34" charset="0"/>
+                <a:ea typeface="Calibri" pitchFamily="34" charset="-122"/>
+                <a:cs typeface="Calibri" pitchFamily="34" charset="-120"/>
+              </a:rPr>
+              <a:t>Names are selected; emails, ids and password hashes are not</a:t>
+            </a:r>
+            <a:endParaRPr lang="en-US" sz="1300" dirty="0"/>
+          </a:p>
+          <a:p>
+            <a:pPr marL="342900" indent="-342900">
+              <a:spcAft>
+                <a:spcPts val="500"/>
+              </a:spcAft>
+              <a:buSzPct val="100000"/>
+              <a:buChar char="•"/>
+            </a:pPr>
+            <a:r>
+              <a:rPr lang="en-US" sz="1300" dirty="0">
+                <a:solidFill>
+                  <a:srgbClr val="17211C"/>
+                </a:solidFill>
+                <a:latin typeface="Calibri" pitchFamily="34" charset="0"/>
+                <a:ea typeface="Calibri" pitchFamily="34" charset="-122"/>
+                <a:cs typeface="Calibri" pitchFamily="34" charset="-120"/>
+              </a:rPr>
+              <a:t>The browser cannot send a system message, only user and assistant</a:t>
+            </a:r>
+            <a:endParaRPr lang="en-US" sz="1300" dirty="0"/>
+          </a:p>
+        </p:txBody>
+      </p:sp>
+      <p:sp>
+        <p:nvSpPr>
+          <p:cNvPr id="10" name="Text 8"/>
+          <p:cNvSpPr txBox="1"/>
+          <p:nvPr/>
+        </p:nvSpPr>
+        <p:spPr>
+          <a:xfrm>
+            <a:off x="640080" y="5029200"/>
+            <a:ext cx="10881360" cy="731520"/>
+          </a:xfrm>
+          <a:prstGeom prst="rect">
+            <a:avLst/>
+          </a:prstGeom>
+          <a:noFill/>
+          <a:ln/>
+        </p:spPr>
+        <p:txBody>
+          <a:bodyPr wrap="square" lIns="0" tIns="0" rIns="0" bIns="0" rtlCol="0" anchor="ctr"/>
+          <a:lstStyle/>
+          <a:p>
+            <a:pPr indent="0" marL="0">
+              <a:buNone/>
+            </a:pPr>
+            <a:r>
+              <a:rPr lang="en-US" sz="1350" i="1" dirty="0">
+                <a:solidFill>
+                  <a:srgbClr val="17211C"/>
+                </a:solidFill>
+                <a:latin typeface="Calibri" pitchFamily="34" charset="0"/>
+                <a:ea typeface="Calibri" pitchFamily="34" charset="-122"/>
+                <a:cs typeface="Calibri" pitchFamily="34" charset="-120"/>
+              </a:rPr>
+              <a:t>A free model tier is not zero-retention: the provider may train on what is sent. Fine for seeded demo data, not for a real team - production would use a zero-retention tier or a self-hosted model.</a:t>
+            </a:r>
+            <a:endParaRPr lang="en-US" sz="1350" dirty="0"/>
           </a:p>
         </p:txBody>
       </p:sp>
@@ -11470,7 +11936,7 @@
                 <a:ea typeface="Cambria" pitchFamily="34" charset="-122"/>
                 <a:cs typeface="Cambria" pitchFamily="34" charset="-120"/>
               </a:rPr>
-              <a:t>Projects are archived, not deleted</a:t>
+              <a:t>A project is deleted only when that is safe</a:t>
             </a:r>
             <a:endParaRPr lang="en-US" sz="1700" dirty="0"/>
           </a:p>
@@ -11513,7 +11979,7 @@
                 <a:ea typeface="Calibri" pitchFamily="34" charset="-122"/>
                 <a:cs typeface="Calibri" pitchFamily="34" charset="-120"/>
               </a:rPr>
-              <a:t>Delete sets isActive = false</a:t>
+              <a:t>Nothing references it, so the row really is deleted</a:t>
             </a:r>
             <a:endParaRPr lang="en-US" sz="1300" dirty="0"/>
           </a:p>
@@ -11534,7 +12000,7 @@
                 <a:ea typeface="Calibri" pitchFamily="34" charset="-122"/>
                 <a:cs typeface="Calibri" pitchFamily="34" charset="-120"/>
               </a:rPr>
-              <a:t>Hidden from new reports, kept for old ones</a:t>
+              <a:t>Reports reference it, so isActive becomes false instead</a:t>
             </a:r>
             <a:endParaRPr lang="en-US" sz="1300" dirty="0"/>
           </a:p>
@@ -11555,7 +12021,7 @@
                 <a:ea typeface="Calibri" pitchFamily="34" charset="-122"/>
                 <a:cs typeface="Calibri" pitchFamily="34" charset="-120"/>
               </a:rPr>
-              <a:t>Hard-deleting would either fail on the foreign key or orphan months of history</a:t>
+              <a:t>Report.projectId is not nullable and carries no cascade, so Postgres refuses the other path</a:t>
             </a:r>
             <a:endParaRPr lang="en-US" sz="1300" dirty="0"/>
           </a:p>
